--- a/Notes/Research_Canvas_McKinley.pptx
+++ b/Notes/Research_Canvas_McKinley.pptx
@@ -565,49 +565,7 @@
         <p:txBody>
           <a:bodyPr/>
           <a:lstStyle/>
-          <a:p>
-            <a:pPr marL="228600" indent="0">
-              <a:buFontTx/>
-              <a:buNone/>
-            </a:pPr>
-            <a:r>
-              <a:rPr lang="en-US" sz="800" kern="1200" dirty="0">
-                <a:solidFill>
-                  <a:schemeClr val="tx1"/>
-                </a:solidFill>
-                <a:latin typeface="+mj-lt"/>
-                <a:ea typeface="+mn-ea"/>
-                <a:cs typeface="+mn-cs"/>
-              </a:rPr>
-              <a:t>Possible data : </a:t>
-            </a:r>
-            <a:r>
-              <a:rPr lang="en-US" sz="1050" dirty="0"/>
-              <a:t>number of tweets by sentiment polarity and location (June 2011–April 2019</a:t>
-            </a:r>
-            <a:endParaRPr lang="en-US" sz="800" kern="1200" dirty="0">
-              <a:solidFill>
-                <a:schemeClr val="tx1"/>
-              </a:solidFill>
-              <a:latin typeface="+mj-lt"/>
-              <a:ea typeface="+mn-ea"/>
-              <a:cs typeface="+mn-cs"/>
-            </a:endParaRPr>
-          </a:p>
-          <a:p>
-            <a:pPr marL="228600" indent="0">
-              <a:buFontTx/>
-              <a:buNone/>
-            </a:pPr>
-            <a:endParaRPr lang="en-US" sz="800" kern="1200" dirty="0">
-              <a:solidFill>
-                <a:schemeClr val="tx1"/>
-              </a:solidFill>
-              <a:latin typeface="+mj-lt"/>
-              <a:ea typeface="+mn-ea"/>
-              <a:cs typeface="+mn-cs"/>
-            </a:endParaRPr>
-          </a:p>
+          <a:p/>
         </p:txBody>
       </p:sp>
       <p:sp>

--- a/Notes/Research_Canvas_McKinley.pptx
+++ b/Notes/Research_Canvas_McKinley.pptx
@@ -4485,7 +4485,7 @@
                             <a:srgbClr val="000000"/>
                           </a:solidFill>
                         </a:rPr>
-                        <a:t>Linear probes (R-squared, 5-fold): RNA 0.059, protein 0.113, concatenation 0.115 (no gain from naive fusion).</a:t>
+                        <a:t>Linear probes (R-squared, 5-fold): RNA 0.015, protein 0.103, concatenation 0.100 (no gain from naive fusion).</a:t>
                       </a:r>
                     </a:p>
                     <a:p>

--- a/Notes/Research_Canvas_McKinley.pptx
+++ b/Notes/Research_Canvas_McKinley.pptx
@@ -4533,7 +4533,7 @@
                             <a:srgbClr val="000000"/>
                           </a:solidFill>
                         </a:rPr>
-                        <a:t>Alignment-performance slope near zero (r = -0.013, p = 0.83): supports H2.</a:t>
+                        <a:t>Alignment–error association near zero (r = -0.013, p = 0.83), an adaptation of the alignment-performance slope: supports H2.</a:t>
                       </a:r>
                     </a:p>
                     <a:p>
@@ -4830,7 +4830,7 @@
                             <a:srgbClr val="000000"/>
                           </a:solidFill>
                         </a:rPr>
-                        <a:t>First application of the alignment-performance slope diagnostic (Tjandrasuwita et al., 2025) to biological sequence modalities.</a:t>
+                        <a:t>First adaptation of the alignment-performance slope diagnostic (Tjandrasuwita et al., 2025) to biological sequence modalities.</a:t>
                       </a:r>
                     </a:p>
                     <a:p>

--- a/Notes/Research_Canvas_McKinley.pptx
+++ b/Notes/Research_Canvas_McKinley.pptx
@@ -4002,7 +4002,7 @@
                             <a:srgbClr val="000000"/>
                           </a:solidFill>
                         </a:rPr>
-                        <a:t> Coupled Mamba: alignment-free state space fusion.</a:t>
+                        <a:t> Coupled Mamba: state-space fusion with no alignment loss.</a:t>
                       </a:r>
                     </a:p>
                     <a:p>
@@ -4463,7 +4463,7 @@
                           </a:solidFill>
                           <a:latin typeface="+mn-lt"/>
                         </a:rPr>
-                        <a:t>Results (Stage 1, preliminary)</a:t>
+                        <a:t>Results (Stage 1 pilot)</a:t>
                       </a:r>
                       <a:endParaRPr lang="en-AU" sz="1000" b="0" dirty="0">
                         <a:latin typeface="+mn-lt"/>
@@ -5422,7 +5422,7 @@
                             <a:srgbClr val="000000"/>
                           </a:solidFill>
                         </a:rPr>
-                        <a:t>Stage 2:</a:t>
+                        <a:t>Stages 2 to 4:</a:t>
                       </a:r>
                       <a:r>
                         <a:rPr sz="700" b="0">
@@ -5430,7 +5430,7 @@
                             <a:srgbClr val="000000"/>
                           </a:solidFill>
                         </a:rPr>
-                        <a:t> codon-level alignment, then cross-attention vs. Coupled Mamba fusion, with and without an alignment loss; 5-fold CV (R-squared, Spearman).</a:t>
+                        <a:t> codon-grid alignment with no alignment loss by default; cross-attention vs. Coupled Mamba fusion against a concatenation + MLP baseline, with and without an alignment loss; 5-fold CV benchmark (R-squared, Spearman) against the best single modality.</a:t>
                       </a:r>
                     </a:p>
                   </a:txBody>
